--- a/slides-en/05-document-drafting.pptx
+++ b/slides-en/05-document-drafting.pptx
@@ -609,43 +609,43 @@
           <a:lstStyle/>
           <a:p>
             <a:r>
-              <a:t>QUYẾT ĐỊNH – TỜ TRÌNH (4 phút)</a:t>
-            </a:r>
-          </a:p>
-          <a:p>
-            <a:r>
-              <a:t>• Quyết định: phần CĂN CỨ + phần các ĐIỀU. Điều cuối GHI HIỆU LỰC.</a:t>
-            </a:r>
-          </a:p>
-          <a:p>
-            <a:r>
-              <a:t>• Lỗi hay gặp: dùng từ "đề nghị" trong quyết định — sai, phải dùng NGÔN NGỮ MỆNH LỆNH.</a:t>
-            </a:r>
-          </a:p>
-          <a:p>
-            <a:r>
-              <a:t>• Tờ trình 3 phần: lý do → phương án → kiến nghị.</a:t>
-            </a:r>
-          </a:p>
-          <a:p>
-            <a:r>
-              <a:t>• Nhấn: tờ trình phải có SỐ LIỆU và DỰ TOÁN, nếu không cấp trên không có cơ sở duyệt.</a:t>
+              <a:t>DECISION AND SUBMISSION (4 minutes)</a:t>
+            </a:r>
+          </a:p>
+          <a:p>
+            <a:r>
+              <a:t>• A decision (quyết định): the RECITALS, then the ARTICLES. The last article STATES WHEN IT TAKES EFFECT.</a:t>
+            </a:r>
+          </a:p>
+          <a:p>
+            <a:r>
+              <a:t>• A common mistake: using the word "request" in a decision — wrong; a decision uses THE LANGUAGE OF COMMAND.</a:t>
+            </a:r>
+          </a:p>
+          <a:p>
+            <a:r>
+              <a:t>• A submission (tờ trình) has three parts: the reason → the proposal → the request for approval.</a:t>
+            </a:r>
+          </a:p>
+          <a:p>
+            <a:r>
+              <a:t>• Press: a submission must carry FIGURES and a COST ESTIMATE, or the person above has nothing to approve on.</a:t>
             </a:r>
           </a:p>
           <a:p/>
           <a:p>
             <a:r>
-              <a:t>NÓI ĐỦ Ý (phần đã rút khỏi slide)</a:t>
-            </a:r>
-          </a:p>
-          <a:p>
-            <a:r>
-              <a:t>• Quyết định: phần căn cứ gồm căn cứ PHÁP LÝ và căn cứ THỰC TIỄN, mỗi căn cứ kết thúc bằng dấu chấm phẩy, căn cứ cuối kết thúc bằng dấu chấm. Điều cuối ghi hiệu lực và đối tượng thi hành.</a:t>
-            </a:r>
-          </a:p>
-          <a:p>
-            <a:r>
-              <a:t>• Tờ trình: mở đầu nêu lý do và sự cần thiết; nội dung trình bày phương án, lợi ích, tính khả thi; kết thúc kiến nghị phê duyệt. Nhớ đính kèm hồ sơ, dự toán.</a:t>
+              <a:t>THE FULL VERSION (moved off the slide)</a:t>
+            </a:r>
+          </a:p>
+          <a:p>
+            <a:r>
+              <a:t>• A decision: the recitals cover both the LEGAL and the FACTUAL basis, each ending in a semicolon and the last in a full stop. The final article states the effective date and who must carry it out.</a:t>
+            </a:r>
+          </a:p>
+          <a:p>
+            <a:r>
+              <a:t>• A submission: the opening gives the reason and the need; the body sets out the proposal, the benefit and the feasibility; the close asks for approval. Remember to attach the file and the cost estimate.</a:t>
             </a:r>
           </a:p>
         </p:txBody>
@@ -731,43 +731,43 @@
           <a:lstStyle/>
           <a:p>
             <a:r>
-              <a:t>CÔNG VĂN – BIÊN BẢN – BÁO CÁO (4 phút)</a:t>
-            </a:r>
-          </a:p>
-          <a:p>
-            <a:r>
-              <a:t>• Công văn: nhắc lại KHÔNG CÓ TÊN LOẠI; mỗi công văn MỘT CHỦ ĐỀ; kết thúc "Trân trọng./."</a:t>
-            </a:r>
-          </a:p>
-          <a:p>
-            <a:r>
-              <a:t>• Biên bản: LẬP NGAY TẠI CHỖ; chữ ký các bên tạo GIÁ TRỊ PHÁP LÝ; người ghi KHÔNG thêm nhận xét chủ quan.</a:t>
-            </a:r>
-          </a:p>
-          <a:p>
-            <a:r>
-              <a:t>• Báo cáo: mạch 4 phần. Nhấn: phải nêu cả HẠN CHẾ, đừng chỉ kể thành tích.</a:t>
+              <a:t>OFFICIAL LETTER, MINUTES, REPORT (4 minutes)</a:t>
+            </a:r>
+          </a:p>
+          <a:p>
+            <a:r>
+              <a:t>• The official letter (công văn): say again it has NO DOCUMENT-TYPE NAME; ONE subject each; it closes with "Yours faithfully./."</a:t>
+            </a:r>
+          </a:p>
+          <a:p>
+            <a:r>
+              <a:t>• Minutes (biên bản): WRITTEN ON THE SPOT; the parties' signatures are what give them LEGAL FORCE; the note-taker adds NO opinion of their own.</a:t>
+            </a:r>
+          </a:p>
+          <a:p>
+            <a:r>
+              <a:t>• A report: four parts in sequence. Press: it must state the SHORTCOMINGS too, not just the achievements.</a:t>
             </a:r>
           </a:p>
           <a:p/>
           <a:p>
             <a:r>
-              <a:t>NÓI ĐỦ Ý (phần đã rút khỏi slide)</a:t>
-            </a:r>
-          </a:p>
-          <a:p>
-            <a:r>
-              <a:t>• Công văn các loại: đề nghị, phúc đáp, đôn đốc, hướng dẫn, giải thích, mời họp. Kết thúc bằng “Trân trọng./.”</a:t>
-            </a:r>
-          </a:p>
-          <a:p>
-            <a:r>
-              <a:t>• Biên bản: chữ ký các bên là yếu tố TẠO GIÁ TRỊ PHÁP LÝ — thiếu chữ ký thì biên bản chỉ là tờ giấy ghi chép.</a:t>
-            </a:r>
-          </a:p>
-          <a:p>
-            <a:r>
-              <a:t>• Báo cáo có bốn dạng: định kỳ, đột xuất, chuyên đề, sơ kết – tổng kết.</a:t>
+              <a:t>THE FULL VERSION (moved off the slide)</a:t>
+            </a:r>
+          </a:p>
+          <a:p>
+            <a:r>
+              <a:t>• Kinds of official letter: requesting, replying, chasing, giving guidance, explaining, inviting to a meeting. Closes with “Yours faithfully./.”</a:t>
+            </a:r>
+          </a:p>
+          <a:p>
+            <a:r>
+              <a:t>• Minutes: the parties' signatures are what CREATE THE LEGAL FORCE — unsigned, minutes are just a sheet of notes.</a:t>
+            </a:r>
+          </a:p>
+          <a:p>
+            <a:r>
+              <a:t>• Reports come in four kinds: periodic, ad hoc, thematic, and interim or final review.</a:t>
             </a:r>
           </a:p>
         </p:txBody>
@@ -853,48 +853,48 @@
           <a:lstStyle/>
           <a:p>
             <a:r>
-              <a:t>THƯ TÍN – BÁO GIÁ (4 phút)</a:t>
-            </a:r>
-          </a:p>
-          <a:p>
-            <a:r>
-              <a:t>• Nguyên tắc 5C: viết 5 chữ C lên bảng, giải nghĩa từng chữ bằng tiếng Việt.</a:t>
-            </a:r>
-          </a:p>
-          <a:p>
-            <a:r>
-              <a:t>• Email: tiêu đề rõ, chữ ký đầy đủ, PHẢN HỒI TRONG 24 GIỜ.</a:t>
-            </a:r>
-          </a:p>
-          <a:p>
-            <a:r>
-              <a:t>• Báo giá: nhấn mạnh THỜI HẠN HIỆU LỰC. Hỏi lớp vì sao cần — vì giá thị trường biến động, tránh bị ràng buộc giá cũ.</a:t>
+              <a:t>LETTERS AND QUOTATIONS (4 minutes)</a:t>
+            </a:r>
+          </a:p>
+          <a:p>
+            <a:r>
+              <a:t>• The 5C rule: write the five Cs on the board and gloss each one.</a:t>
+            </a:r>
+          </a:p>
+          <a:p>
+            <a:r>
+              <a:t>• Email: a clear subject line, a full signature block, A REPLY WITHIN 24 HOURS.</a:t>
+            </a:r>
+          </a:p>
+          <a:p>
+            <a:r>
+              <a:t>• A quotation: press the VALIDITY PERIOD. Ask the class why it is needed — because market prices move, and you don't want to be held to yesterday's.</a:t>
             </a:r>
           </a:p>
           <a:p/>
           <a:p>
             <a:r>
-              <a:t>NÓI ĐỦ Ý (phần đã rút khỏi slide)</a:t>
-            </a:r>
-          </a:p>
-          <a:p>
-            <a:r>
-              <a:t>• Nguyên tắc 5C: Clear (rõ) • Concise (gọn) • Correct (đúng) • Complete (đủ) • Courteous (lịch sự).</a:t>
-            </a:r>
-          </a:p>
-          <a:p>
-            <a:r>
-              <a:t>• Kết cấu thư: mở đầu – nội dung – kết thúc.</a:t>
-            </a:r>
-          </a:p>
-          <a:p>
-            <a:r>
-              <a:t>• Báo giá phải có THỜI HẠN HIỆU LỰC — thiếu là tranh chấp khi giá thị trường biến động.</a:t>
-            </a:r>
-          </a:p>
-          <a:p>
-            <a:r>
-              <a:t>• Email: phản hồi trong 24 giờ, kể cả khi chỉ để báo “đã nhận, đang xử lý”.</a:t>
+              <a:t>THE FULL VERSION (moved off the slide)</a:t>
+            </a:r>
+          </a:p>
+          <a:p>
+            <a:r>
+              <a:t>• The 5C rule: Clear • Concise • Correct • Complete • Courteous.</a:t>
+            </a:r>
+          </a:p>
+          <a:p>
+            <a:r>
+              <a:t>• Letter structure: opening – body – close.</a:t>
+            </a:r>
+          </a:p>
+          <a:p>
+            <a:r>
+              <a:t>• A quotation must carry a VALIDITY PERIOD — without one you get a dispute the moment prices move.</a:t>
+            </a:r>
+          </a:p>
+          <a:p>
+            <a:r>
+              <a:t>• Email: reply within 24 hours, even if only to say “received, in hand”.</a:t>
             </a:r>
           </a:p>
         </p:txBody>
@@ -980,53 +980,53 @@
           <a:lstStyle/>
           <a:p>
             <a:r>
-              <a:t>BỘ BA VĂN BẢN (4 phút)</a:t>
-            </a:r>
-          </a:p>
-          <a:p>
-            <a:r>
-              <a:t>• Căn cứ pháp lý: Bộ luật Dân sự 2015 và Luật Thương mại 2005.</a:t>
-            </a:r>
-          </a:p>
-          <a:p>
-            <a:r>
-              <a:t>• Điểm qua 5 điều khoản chính, nhấn PHẠT VI PHẠM và GIẢI QUYẾT TRANH CHẤP — hai điều sinh viên hay quên.</a:t>
-            </a:r>
-          </a:p>
-          <a:p>
-            <a:r>
-              <a:t>• Nghiệm thu = căn cứ THANH TOÁN. Thanh lý = CHẤM DỨT hiệu lực và quyết toán.</a:t>
-            </a:r>
-          </a:p>
-          <a:p>
-            <a:r>
-              <a:t>• Câu chốt: "Đủ bộ ba này thì hồ sơ thương vụ mới trọn vẹn về pháp lý."''</a:t>
+              <a:t>THE SET OF THREE (4 minutes)</a:t>
+            </a:r>
+          </a:p>
+          <a:p>
+            <a:r>
+              <a:t>• The legal basis: the Civil Code 2015 and the Commercial Law 2005.</a:t>
+            </a:r>
+          </a:p>
+          <a:p>
+            <a:r>
+              <a:t>• Run through the five main clauses, pressing PENALTIES FOR BREACH and DISPUTE RESOLUTION — the two students forget.</a:t>
+            </a:r>
+          </a:p>
+          <a:p>
+            <a:r>
+              <a:t>• The acceptance record is the basis for PAYMENT. The liquidation record ENDS the contract and settles the account.</a:t>
+            </a:r>
+          </a:p>
+          <a:p>
+            <a:r>
+              <a:t>• The closing line: "Only with all three is the file for a deal legally complete."''</a:t>
             </a:r>
           </a:p>
           <a:p/>
           <a:p>
             <a:r>
-              <a:t>NÓI ĐỦ Ý (phần đã rút khỏi slide)</a:t>
-            </a:r>
-          </a:p>
-          <a:p>
-            <a:r>
-              <a:t>• Hợp đồng thương mại căn cứ Bộ luật Dân sự 2015 và Luật Thương mại 2005.</a:t>
-            </a:r>
-          </a:p>
-          <a:p>
-            <a:r>
-              <a:t>• Bộ ba khép kín một thương vụ: hợp đồng → biên bản nghiệm thu → biên bản thanh lý.</a:t>
-            </a:r>
-          </a:p>
-          <a:p>
-            <a:r>
-              <a:t>• Nghiệm thu xác nhận khối lượng và chất lượng, là căn cứ để thanh toán.</a:t>
-            </a:r>
-          </a:p>
-          <a:p>
-            <a:r>
-              <a:t>• Thanh lý xác nhận hoàn thành nghĩa vụ và quyết toán phần còn lại.</a:t>
+              <a:t>THE FULL VERSION (moved off the slide)</a:t>
+            </a:r>
+          </a:p>
+          <a:p>
+            <a:r>
+              <a:t>• A commercial contract rests on the Civil Code 2015 and the Commercial Law 2005.</a:t>
+            </a:r>
+          </a:p>
+          <a:p>
+            <a:r>
+              <a:t>• The set of three closes a deal: contract → acceptance record → liquidation record.</a:t>
+            </a:r>
+          </a:p>
+          <a:p>
+            <a:r>
+              <a:t>• The acceptance record confirms quantity and quality, and is the basis for payment.</a:t>
+            </a:r>
+          </a:p>
+          <a:p>
+            <a:r>
+              <a:t>• The liquidation record confirms the obligations are discharged and settles what remains.</a:t>
             </a:r>
           </a:p>
         </p:txBody>
@@ -1112,27 +1112,27 @@
           <a:lstStyle/>
           <a:p>
             <a:r>
-              <a:t>HOẠT ĐỘNG NHÓM (20 phút)</a:t>
-            </a:r>
-          </a:p>
-          <a:p>
-            <a:r>
-              <a:t>• Nối tiếp thương vụ đã đàm phán ở Chương 4 — nhắc lại tình huống 1 câu.</a:t>
-            </a:r>
-          </a:p>
-          <a:p>
-            <a:r>
-              <a:t>• Nhóm 4–5 bạn, 15 phút làm, 5 phút trình bày.</a:t>
-            </a:r>
-          </a:p>
-          <a:p>
-            <a:r>
-              <a:t>• Yêu cầu nhóm VẼ chuỗi văn bản lên giấy A3 kèm người ký từng văn bản.</a:t>
-            </a:r>
-          </a:p>
-          <a:p>
-            <a:r>
-              <a:t>• Cô chốt bằng cách so sánh với sơ đồ chuẩn trên slide.</a:t>
+              <a:t>GROUP WORK (20 minutes)</a:t>
+            </a:r>
+          </a:p>
+          <a:p>
+            <a:r>
+              <a:t>• Continue the deal negotiated in Chapter 4 — restate the situation in one sentence.</a:t>
+            </a:r>
+          </a:p>
+          <a:p>
+            <a:r>
+              <a:t>• Groups of 4–5, 15 minutes to work, 5 minutes to present.</a:t>
+            </a:r>
+          </a:p>
+          <a:p>
+            <a:r>
+              <a:t>• Require each group to DRAW the document chain on an A3 sheet, naming who signs each document.</a:t>
+            </a:r>
+          </a:p>
+          <a:p>
+            <a:r>
+              <a:t>• Land it by comparing their chains with the standard diagram on the slide.</a:t>
             </a:r>
           </a:p>
         </p:txBody>
@@ -1218,17 +1218,17 @@
           <a:lstStyle/>
           <a:p>
             <a:r>
-              <a:t>TỔNG KẾT (2 phút)</a:t>
-            </a:r>
-          </a:p>
-          <a:p>
-            <a:r>
-              <a:t>• Nhắc 3 điều, gọi sinh viên nhắc lại 9 thành phần thể thức.</a:t>
-            </a:r>
-          </a:p>
-          <a:p>
-            <a:r>
-              <a:t>• Dặn kỹ chuẩn bị buổi thực hành: MANG LAPTOP, cài Word, tải NĐ 30/2020.</a:t>
+              <a:t>SUMMARY (2 minutes)</a:t>
+            </a:r>
+          </a:p>
+          <a:p>
+            <a:r>
+              <a:t>• Three points; call on a student to name the nine components of the format.</a:t>
+            </a:r>
+          </a:p>
+          <a:p>
+            <a:r>
+              <a:t>• Be firm about preparing for the lab: BRING A LAPTOP, install Word, download Decree 30/2020.</a:t>
             </a:r>
           </a:p>
         </p:txBody>
@@ -1314,7 +1314,7 @@
           <a:lstStyle/>
           <a:p>
             <a:r>
-              <a:t>ÔN TẬP (1 phút) — tự làm; nhấn câu về 9 thành phần thể thức sẽ có trong đề thi.</a:t>
+              <a:t>REVISION (1 minute) — at home; flag that the question on the nine format components will be on the exam paper.</a:t>
             </a:r>
           </a:p>
         </p:txBody>
@@ -1400,7 +1400,7 @@
           <a:lstStyle/>
           <a:p>
             <a:r>
-              <a:t>TÀI LIỆU (1 phút) — nhắc mở học liệu số để xem văn bản mẫu trước buổi thực hành.</a:t>
+              <a:t>READING (1 minute) — remind them to open the digital materials and look at the specimen documents before the lab.</a:t>
             </a:r>
           </a:p>
         </p:txBody>
@@ -1486,27 +1486,27 @@
           <a:lstStyle/>
           <a:p>
             <a:r>
-              <a:t>BỐN CON SỐ (2 phút)</a:t>
-            </a:r>
-          </a:p>
-          <a:p>
-            <a:r>
-              <a:t>• Đây là slide sinh viên phải THUỘC LÒNG — sẽ ra thi và dùng suốt 3 buổi thực hành.</a:t>
-            </a:r>
-          </a:p>
-          <a:p>
-            <a:r>
-              <a:t>• Đọc chậm từng con số, yêu cầu cả lớp ghi vào vở.</a:t>
-            </a:r>
-          </a:p>
-          <a:p>
-            <a:r>
-              <a:t>• Mẹo nhớ lề trái rộng nhất: để ĐÓNG GÁY.</a:t>
-            </a:r>
-          </a:p>
-          <a:p>
-            <a:r>
-              <a:t>• Kiểm tra ngay: gọi 2 sinh viên nhắc lại không nhìn slide.</a:t>
+              <a:t>FOUR NUMBERS (2 minutes)</a:t>
+            </a:r>
+          </a:p>
+          <a:p>
+            <a:r>
+              <a:t>• This is the slide students must KNOW BY HEART — it is on the exam and used throughout the three lab sessions.</a:t>
+            </a:r>
+          </a:p>
+          <a:p>
+            <a:r>
+              <a:t>• Read each figure slowly; have the whole class write them down.</a:t>
+            </a:r>
+          </a:p>
+          <a:p>
+            <a:r>
+              <a:t>• How to remember that the left margin is widest: it is for BINDING.</a:t>
+            </a:r>
+          </a:p>
+          <a:p>
+            <a:r>
+              <a:t>• Test it at once: call on two students to recite them without looking at the slide.</a:t>
             </a:r>
           </a:p>
         </p:txBody>
@@ -1576,7 +1576,7 @@
           <a:lstStyle/>
           <a:p>
             <a:r>
-              <a:t>CHUYỂN MỤC (30 giây).</a:t>
+              <a:t>SECTION CHANGE (30 seconds).</a:t>
             </a:r>
           </a:p>
         </p:txBody>
@@ -1646,7 +1646,7 @@
           <a:lstStyle/>
           <a:p>
             <a:r>
-              <a:t>MỤC TIÊU (1 phút) — nhấn: chương này gắn liền 3 buổi thực hành ở phòng máy.</a:t>
+              <a:t>OBJECTIVES (1 minute) — press it: this chapter runs straight into the three computer-lab sessions.</a:t>
             </a:r>
           </a:p>
         </p:txBody>
@@ -1732,7 +1732,7 @@
           <a:lstStyle/>
           <a:p>
             <a:r>
-              <a:t>CHUYỂN MỤC (30 giây) — nhắc: bài thực hành số 2 làm đúng năm loại này.</a:t>
+              <a:t>SECTION CHANGE (30 seconds) — remind them lab session 2 uses exactly these five types.</a:t>
             </a:r>
           </a:p>
         </p:txBody>
@@ -1802,7 +1802,7 @@
           <a:lstStyle/>
           <a:p>
             <a:r>
-              <a:t>CHUYỂN MỤC (30 giây) — nhắc: bài thực hành số 3 làm đúng bộ hồ sơ này.</a:t>
+              <a:t>SECTION CHANGE (30 seconds) — remind them lab session 3 produces exactly this set of documents.</a:t>
             </a:r>
           </a:p>
         </p:txBody>
@@ -1872,7 +1872,7 @@
           <a:lstStyle/>
           <a:p>
             <a:r>
-              <a:t>LỘ TRÌNH (1 phút) — 4 mục: khái niệm, thể thức, hành chính, thương mại.</a:t>
+              <a:t>THE MAP (1 minute) — four parts: the concept, the format, administrative documents, commercial documents.</a:t>
             </a:r>
           </a:p>
         </p:txBody>
@@ -1958,43 +1958,43 @@
           <a:lstStyle/>
           <a:p>
             <a:r>
-              <a:t>KHÁI NIỆM (3 phút)</a:t>
-            </a:r>
-          </a:p>
-          <a:p>
-            <a:r>
-              <a:t>• Đọc chậm định nghĩa của NĐ 30/2020 — đây là câu SẼ RA THI.</a:t>
-            </a:r>
-          </a:p>
-          <a:p>
-            <a:r>
-              <a:t>• Nhấn cụm "TRÌNH BÀY ĐÚNG THỂ THỨC, KỸ THUẬT THEO QUY ĐỊNH": nội dung hay mà sai thể thức thì vẫn bị trả lại.</a:t>
-            </a:r>
-          </a:p>
-          <a:p>
-            <a:r>
-              <a:t>• Vai trò: nhấn "căn cứ pháp lý" — cho ví dụ tranh chấp hợp đồng ra tòa, cái tòa xem là VĂN BẢN.</a:t>
+              <a:t>THE CONCEPT (3 minutes)</a:t>
+            </a:r>
+          </a:p>
+          <a:p>
+            <a:r>
+              <a:t>• Read the Decree 30/2020 definition slowly — this sentence WILL BE ON THE EXAM.</a:t>
+            </a:r>
+          </a:p>
+          <a:p>
+            <a:r>
+              <a:t>• Press the phrase "SET OUT IN THE FORMAT AND TO THE TECHNICAL STANDARD PRESCRIBED": good content in the wrong format still comes back rejected.</a:t>
+            </a:r>
+          </a:p>
+          <a:p>
+            <a:r>
+              <a:t>• Its roles: press "legal basis" — give the example of a contract dispute in court, where what the court looks at is THE DOCUMENT.</a:t>
             </a:r>
           </a:p>
           <a:p/>
           <a:p>
             <a:r>
-              <a:t>NÓI ĐỦ Ý (phần đã rút khỏi slide)</a:t>
-            </a:r>
-          </a:p>
-          <a:p>
-            <a:r>
-              <a:t>• Định nghĩa pháp lý đầy đủ, Nghị định 30/2020/NĐ-CP: “Văn bản là thông tin thành văn được truyền đạt bằng ngôn ngữ hoặc ký hiệu, hình thành trong hoạt động của các cơ quan, tổ chức và được trình bày đúng thể thức, kỹ thuật theo quy định.”</a:t>
-            </a:r>
-          </a:p>
-          <a:p>
-            <a:r>
-              <a:t>• Cách hiểu chung: hình thành trong hoạt động của cơ quan, tổ chức, DOANH NGHIỆP — không chỉ cơ quan nhà nước.</a:t>
-            </a:r>
-          </a:p>
-          <a:p>
-            <a:r>
-              <a:t>• Bốn vai trò: phương tiện quản lý – điều hành; căn cứ pháp lý; lưu trữ thông tin; thể hiện hình ảnh chuyên nghiệp của tổ chức.</a:t>
+              <a:t>THE FULL VERSION (moved off the slide)</a:t>
+            </a:r>
+          </a:p>
+          <a:p>
+            <a:r>
+              <a:t>• The full legal definition, Decree 30/2020/NĐ-CP: “A document is written information conveyed in language or symbols, arising in the work of an agency or organisation and set out in the format and to the technical standard prescribed.”</a:t>
+            </a:r>
+          </a:p>
+          <a:p>
+            <a:r>
+              <a:t>• The everyday reading: arising in the work of an agency, an organisation, a BUSINESS — not only state bodies.</a:t>
+            </a:r>
+          </a:p>
+          <a:p>
+            <a:r>
+              <a:t>• Four roles: an instrument of management; a legal basis; a record; and a display of the organisation's professionalism.</a:t>
             </a:r>
           </a:p>
         </p:txBody>
@@ -2080,22 +2080,22 @@
           <a:lstStyle/>
           <a:p>
             <a:r>
-              <a:t>PHÂN LOẠI (3 phút)</a:t>
-            </a:r>
-          </a:p>
-          <a:p>
-            <a:r>
-              <a:t>• 4 nhóm — vẽ sơ đồ cây lên bảng.</a:t>
-            </a:r>
-          </a:p>
-          <a:p>
-            <a:r>
-              <a:t>• Nhấn: doanh nghiệp KHÔNG ban hành văn bản quy phạm pháp luật, nhưng phải tuân thủ.</a:t>
-            </a:r>
-          </a:p>
-          <a:p>
-            <a:r>
-              <a:t>• Con số phải nhớ: 29 LOẠI văn bản hành chính theo NĐ 30/2020.</a:t>
+              <a:t>CLASSIFICATION (3 minutes)</a:t>
+            </a:r>
+          </a:p>
+          <a:p>
+            <a:r>
+              <a:t>• Four groups — draw the tree on the board.</a:t>
+            </a:r>
+          </a:p>
+          <a:p>
+            <a:r>
+              <a:t>• Press: a business does NOT issue legal instruments, but must comply with them.</a:t>
+            </a:r>
+          </a:p>
+          <a:p>
+            <a:r>
+              <a:t>• A number to remember: 29 TYPES of administrative document under Decree 30/2020.</a:t>
             </a:r>
           </a:p>
         </p:txBody>
@@ -2181,48 +2181,48 @@
           <a:lstStyle/>
           <a:p>
             <a:r>
-              <a:t>YÊU CẦU NỘI DUNG (3 phút)</a:t>
-            </a:r>
-          </a:p>
-          <a:p>
-            <a:r>
-              <a:t>• Đi 4 yêu cầu, mỗi yêu cầu một ví dụ lỗi thực tế.</a:t>
-            </a:r>
-          </a:p>
-          <a:p>
-            <a:r>
-              <a:t>• Nhấn yêu cầu 2: "Một con số sai trong văn bản có thể tạo hậu quả pháp lý rất lớn" — ví dụ ghi nhầm đơn giá trong hợp đồng.</a:t>
-            </a:r>
-          </a:p>
-          <a:p>
-            <a:r>
-              <a:t>• Yêu cầu 4: đọc vài câu KHẨU NGỮ sai chuẩn cho lớp nhận diện ("mong anh chị thông cảm giúp em nha").</a:t>
+              <a:t>REQUIREMENTS OF CONTENT (3 minutes)</a:t>
+            </a:r>
+          </a:p>
+          <a:p>
+            <a:r>
+              <a:t>• Four requirements, one real mistake as an example for each.</a:t>
+            </a:r>
+          </a:p>
+          <a:p>
+            <a:r>
+              <a:t>• Press requirement 2: "One wrong figure in a document can carry very large legal consequences" — for example a unit price mistyped in a contract.</a:t>
+            </a:r>
+          </a:p>
+          <a:p>
+            <a:r>
+              <a:t>• Requirement 4: read out a few sub-standard COLLOQUIAL lines for the class to spot ("hope you'll be nice and understanding about it").</a:t>
             </a:r>
           </a:p>
           <a:p/>
           <a:p>
             <a:r>
-              <a:t>NÓI ĐỦ Ý (phần đã rút khỏi slide)</a:t>
-            </a:r>
-          </a:p>
-          <a:p>
-            <a:r>
-              <a:t>• Đúng mục đích: mỗi văn bản tập trung MỘT chủ đề; ban hành đúng chức năng, nhiệm vụ.</a:t>
-            </a:r>
-          </a:p>
-          <a:p>
-            <a:r>
-              <a:t>• Chính xác: một con số sai có thể tạo hậu quả pháp lý lớn — nhấn mạnh chỗ này cho sinh viên.</a:t>
-            </a:r>
-          </a:p>
-          <a:p>
-            <a:r>
-              <a:t>• Rõ ràng: người nhận đọc MỘT LẦN là hiểu đúng ý người soạn.</a:t>
-            </a:r>
-          </a:p>
-          <a:p>
-            <a:r>
-              <a:t>• Ngôn ngữ hành chính: nghiêm túc, lịch sự, không khẩu ngữ.</a:t>
+              <a:t>THE FULL VERSION (moved off the slide)</a:t>
+            </a:r>
+          </a:p>
+          <a:p>
+            <a:r>
+              <a:t>• Right purpose: each document covers ONE subject; issued within the issuer's proper function.</a:t>
+            </a:r>
+          </a:p>
+          <a:p>
+            <a:r>
+              <a:t>• Accuracy: one wrong figure can carry large legal consequences — press this hard with students.</a:t>
+            </a:r>
+          </a:p>
+          <a:p>
+            <a:r>
+              <a:t>• Clarity: the recipient reads it ONCE and takes the intended meaning.</a:t>
+            </a:r>
+          </a:p>
+          <a:p>
+            <a:r>
+              <a:t>• Administrative register: serious, courteous, no colloquialism.</a:t>
             </a:r>
           </a:p>
         </p:txBody>
@@ -2308,32 +2308,32 @@
           <a:lstStyle/>
           <a:p>
             <a:r>
-              <a:t>SƠ ĐỒ THỂ THỨC (5 phút) — SLIDE QUAN TRỌNG NHẤT HỌC PHẦN</a:t>
-            </a:r>
-          </a:p>
-          <a:p>
-            <a:r>
-              <a:t>• Yêu cầu cả lớp CHỤP LẠI SLIDE NÀY.</a:t>
-            </a:r>
-          </a:p>
-          <a:p>
-            <a:r>
-              <a:t>• Chỉ từng số trên sơ đồ theo thứ tự 1 → 9, mỗi thành phần nói vị trí + một lưu ý.</a:t>
-            </a:r>
-          </a:p>
-          <a:p>
-            <a:r>
-              <a:t>• Nhấn thành phần 5: CÔNG VĂN KHÔNG CÓ TÊN LOẠI, trích yếu bắt đầu bằng "V/v".</a:t>
-            </a:r>
-          </a:p>
-          <a:p>
-            <a:r>
-              <a:t>• Nhấn thành phần 9: nơi nhận LUÔN có dòng cuối "Lưu: VT".</a:t>
-            </a:r>
-          </a:p>
-          <a:p>
-            <a:r>
-              <a:t>• Nói rõ: 3 buổi thực hành sắp tới đều chấm theo sơ đồ này.</a:t>
+              <a:t>THE FORMAT DIAGRAM (5 minutes) — THE MOST IMPORTANT SLIDE OF THE COURSE</a:t>
+            </a:r>
+          </a:p>
+          <a:p>
+            <a:r>
+              <a:t>• Tell the whole class to PHOTOGRAPH THIS SLIDE.</a:t>
+            </a:r>
+          </a:p>
+          <a:p>
+            <a:r>
+              <a:t>• Point at each number on the diagram in order 1 → 9; for each, give the position plus one thing to watch.</a:t>
+            </a:r>
+          </a:p>
+          <a:p>
+            <a:r>
+              <a:t>• Press component 5: AN OFFICIAL LETTER (công văn) HAS NO DOCUMENT-TYPE NAME, and its subject line starts with "V/v" (re:).</a:t>
+            </a:r>
+          </a:p>
+          <a:p>
+            <a:r>
+              <a:t>• Press component 9: the distribution list ALWAYS ends with the line "Filed: Registry".</a:t>
+            </a:r>
+          </a:p>
+          <a:p>
+            <a:r>
+              <a:t>• Say it plainly: all three lab sessions ahead are marked against this diagram.</a:t>
             </a:r>
           </a:p>
         </p:txBody>
@@ -2419,53 +2419,53 @@
           <a:lstStyle/>
           <a:p>
             <a:r>
-              <a:t>CÁC CON SỐ (3 phút)</a:t>
-            </a:r>
-          </a:p>
-          <a:p>
-            <a:r>
-              <a:t>• Đọc chậm từng con số, cho sinh viên ghi vào vở.</a:t>
-            </a:r>
-          </a:p>
-          <a:p>
-            <a:r>
-              <a:t>• Mẹo nhớ LỀ TRÁI 30–35mm: rộng nhất vì để ĐÓNG GÁY LƯU TRỮ.</a:t>
-            </a:r>
-          </a:p>
-          <a:p>
-            <a:r>
-              <a:t>• Nhấn: Times New Roman, Unicode, cỡ 13–14. Không dùng Arial, không dùng TCVN3.</a:t>
-            </a:r>
-          </a:p>
-          <a:p>
-            <a:r>
-              <a:t>• Số trang: TỪ TRANG THỨ HAI, canh giữa LỀ TRÊN (nhiều bạn hay đặt ở dưới — sai).</a:t>
+              <a:t>THE NUMBERS (3 minutes)</a:t>
+            </a:r>
+          </a:p>
+          <a:p>
+            <a:r>
+              <a:t>• Read each figure slowly and have students write it down.</a:t>
+            </a:r>
+          </a:p>
+          <a:p>
+            <a:r>
+              <a:t>• How to remember the 30–35 mm LEFT MARGIN: it is the widest because it takes the BINDING for the archive.</a:t>
+            </a:r>
+          </a:p>
+          <a:p>
+            <a:r>
+              <a:t>• Press: Times New Roman, Unicode, 13–14 pt. Not Arial, not the old TCVN3 encoding.</a:t>
+            </a:r>
+          </a:p>
+          <a:p>
+            <a:r>
+              <a:t>• Page numbers: FROM THE SECOND PAGE, centred in the TOP margin (many students put them at the bottom — wrong).</a:t>
             </a:r>
           </a:p>
           <a:p/>
           <a:p>
             <a:r>
-              <a:t>NÓI ĐỦ Ý (phần đã rút khỏi slide)</a:t>
-            </a:r>
-          </a:p>
-          <a:p>
-            <a:r>
-              <a:t>• Lề trái 30–35 mm rộng hơn vì phải chừa chỗ ĐÓNG GÁY.</a:t>
-            </a:r>
-          </a:p>
-          <a:p>
-            <a:r>
-              <a:t>• Phông Times New Roman, bộ mã Unicode, cỡ 13–14, màu đen.</a:t>
-            </a:r>
-          </a:p>
-          <a:p>
-            <a:r>
-              <a:t>• Số trang: đánh từ trang THỨ HAI, chữ số Ả Rập, canh giữa theo lề trên.</a:t>
-            </a:r>
-          </a:p>
-          <a:p>
-            <a:r>
-              <a:t>• Ngôn ngữ: viết hoa và viết tắt phải đúng quy định; số liệu dùng chữ số Ả Rập.</a:t>
+              <a:t>THE FULL VERSION (moved off the slide)</a:t>
+            </a:r>
+          </a:p>
+          <a:p>
+            <a:r>
+              <a:t>• The left margin of 30–35 mm is wider because it has to leave room for BINDING.</a:t>
+            </a:r>
+          </a:p>
+          <a:p>
+            <a:r>
+              <a:t>• Font Times New Roman, Unicode encoding, 13–14 pt, black.</a:t>
+            </a:r>
+          </a:p>
+          <a:p>
+            <a:r>
+              <a:t>• Page numbers: from the SECOND page, Arabic numerals, centred on the top margin.</a:t>
+            </a:r>
+          </a:p>
+          <a:p>
+            <a:r>
+              <a:t>• Language: capitalisation and abbreviation as prescribed; figures in Arabic numerals.</a:t>
             </a:r>
           </a:p>
         </p:txBody>
@@ -2551,22 +2551,22 @@
           <a:lstStyle/>
           <a:p>
             <a:r>
-              <a:t>CHUỖI VĂN BẢN (3 phút)</a:t>
-            </a:r>
-          </a:p>
-          <a:p>
-            <a:r>
-              <a:t>• Chỉ vào sơ đồ chuỗi: từ tờ trình → quyết định → công văn → hợp đồng → nghiệm thu → thanh lý.</a:t>
-            </a:r>
-          </a:p>
-          <a:p>
-            <a:r>
-              <a:t>• Nói rõ: bài thực hành số 2 làm phần đầu chuỗi, bài số 3 làm phần sau.</a:t>
-            </a:r>
-          </a:p>
-          <a:p>
-            <a:r>
-              <a:t>• Hỏi lớp: "Nếu bỏ qua biên bản nghiệm thu thì rủi ro gì?" (không có căn cứ thanh toán).</a:t>
+              <a:t>THE DOCUMENT CHAIN (3 minutes)</a:t>
+            </a:r>
+          </a:p>
+          <a:p>
+            <a:r>
+              <a:t>• Point along the chain: submission (tờ trình) → decision (quyết định) → official letter (công văn) → contract → acceptance record → liquidation record.</a:t>
+            </a:r>
+          </a:p>
+          <a:p>
+            <a:r>
+              <a:t>• Say it plainly: lab session 2 covers the front of the chain, session 3 the back.</a:t>
+            </a:r>
+          </a:p>
+          <a:p>
+            <a:r>
+              <a:t>• Ask the class: "What is the risk of skipping the acceptance record?" (no basis for payment).</a:t>
             </a:r>
           </a:p>
         </p:txBody>

--- a/slides-en/05-document-drafting.pptx
+++ b/slides-en/05-document-drafting.pptx
@@ -521,10 +521,18 @@
           <a:lstStyle/>
           <a:p>
             <a:r>
-              <a:rPr lang="en-US" dirty="0"/>
-              <a:t/>
-            </a:r>
-            <a:endParaRPr lang="en-US" dirty="0"/>
+              <a:t>OPENING (2 minutes)</a:t>
+            </a:r>
+          </a:p>
+          <a:p>
+            <a:r>
+              <a:t>• The way in: "Chapter 4 taught you to reach an agreement in speech. Chapter 5 teaches you to turn speech into a document with legal force."</a:t>
+            </a:r>
+          </a:p>
+          <a:p>
+            <a:r>
+              <a:t>• Ask the class: "Who has written a letter asking for leave from class? Was it in the correct format?"''</a:t>
+            </a:r>
           </a:p>
         </p:txBody>
       </p:sp>
